--- a/授课课件/C++进阶：类、常用库函数与STL入门.pptx
+++ b/授课课件/C++进阶：类、常用库函数与STL入门.pptx
@@ -14795,7 +14795,7 @@
         </p:nvSpPr>
         <p:spPr>
           <a:xfrm>
-            <a:off x="762000" y="3873500"/>
+            <a:off x="762000" y="3535680"/>
             <a:ext cx="10668000" cy="762000"/>
           </a:xfrm>
           <a:prstGeom prst="rect">
@@ -14918,7 +14918,7 @@
         </p:nvSpPr>
         <p:spPr>
           <a:xfrm>
-            <a:off x="762000" y="4504690"/>
+            <a:off x="801370" y="4289425"/>
             <a:ext cx="10668000" cy="2352675"/>
           </a:xfrm>
           <a:prstGeom prst="roundRect">
@@ -14955,7 +14955,7 @@
         </p:nvSpPr>
         <p:spPr>
           <a:xfrm>
-            <a:off x="952500" y="4927600"/>
+            <a:off x="991870" y="4608830"/>
             <a:ext cx="10287000" cy="1714500"/>
           </a:xfrm>
           <a:prstGeom prst="rect">
